--- a/public/fun/pack/pptx/wedding/결혼식_06_소개중심_봄비창가.pptx
+++ b/public/fun/pack/pptx/wedding/결혼식_06_소개중심_봄비창가.pptx
@@ -3347,7 +3347,7 @@
             <a:r>
               <a:rPr sz="3600" b="1" i="0">
                 <a:solidFill>
-                  <a:srgbClr val="29465B"/>
+                  <a:srgbClr val="224E6D"/>
                 </a:solidFill>
               </a:rPr>
               <a:t>저희 결혼합니다</a:t>
@@ -3385,7 +3385,7 @@
             <a:r>
               <a:rPr sz="1700" b="0" i="1">
                 <a:solidFill>
-                  <a:srgbClr val="29465B"/>
+                  <a:srgbClr val="224E6D"/>
                 </a:solidFill>
               </a:rPr>
               <a:t>날을 잡고 청첩장을 보냅니다</a:t>
@@ -3460,7 +3460,7 @@
     <p:bg>
       <p:bgPr>
         <a:solidFill>
-          <a:srgbClr val="F1F5F9"/>
+          <a:srgbClr val="F3F8FC"/>
         </a:solidFill>
         <a:effectLst/>
       </p:bgPr>
@@ -3487,7 +3487,7 @@
             <a:avLst/>
           </a:prstGeom>
           <a:solidFill>
-            <a:srgbClr val="497DA2"/>
+            <a:srgbClr val="5196C8"/>
           </a:solidFill>
           <a:ln>
             <a:noFill/>
@@ -3516,7 +3516,7 @@
             <a:avLst/>
           </a:prstGeom>
           <a:solidFill>
-            <a:srgbClr val="8D3F46"/>
+            <a:srgbClr val="339941"/>
           </a:solidFill>
           <a:ln>
             <a:noFill/>
@@ -3560,7 +3560,7 @@
             <a:r>
               <a:rPr sz="3000" b="1" i="0">
                 <a:solidFill>
-                  <a:srgbClr val="29465B"/>
+                  <a:srgbClr val="224E6D"/>
                 </a:solidFill>
               </a:rPr>
               <a:t>신랑 · 신부 소개</a:t>
@@ -3583,11 +3583,11 @@
             <a:avLst/>
           </a:prstGeom>
           <a:solidFill>
-            <a:srgbClr val="D3E3EE"/>
+            <a:srgbClr val="D4E8F7"/>
           </a:solidFill>
           <a:ln w="19050">
             <a:solidFill>
-              <a:srgbClr val="497DA2"/>
+              <a:srgbClr val="5196C8"/>
             </a:solidFill>
             <a:prstDash val="dash"/>
           </a:ln>
@@ -3606,7 +3606,7 @@
             <a:r>
               <a:rPr sz="1200" b="0" i="0">
                 <a:solidFill>
-                  <a:srgbClr val="29465B"/>
+                  <a:srgbClr val="224E6D"/>
                 </a:solidFill>
               </a:rPr>
               <a:t>사진</a:t>
@@ -3644,7 +3644,7 @@
             <a:r>
               <a:rPr sz="1600" b="1" i="0">
                 <a:solidFill>
-                  <a:srgbClr val="29465B"/>
+                  <a:srgbClr val="224E6D"/>
                 </a:solidFill>
               </a:rPr>
               <a:t>신랑</a:t>
@@ -3735,11 +3735,11 @@
             <a:avLst/>
           </a:prstGeom>
           <a:solidFill>
-            <a:srgbClr val="D3E3EE"/>
+            <a:srgbClr val="D4E8F7"/>
           </a:solidFill>
           <a:ln w="19050">
             <a:solidFill>
-              <a:srgbClr val="497DA2"/>
+              <a:srgbClr val="5196C8"/>
             </a:solidFill>
             <a:prstDash val="dash"/>
           </a:ln>
@@ -3758,7 +3758,7 @@
             <a:r>
               <a:rPr sz="1200" b="0" i="0">
                 <a:solidFill>
-                  <a:srgbClr val="29465B"/>
+                  <a:srgbClr val="224E6D"/>
                 </a:solidFill>
               </a:rPr>
               <a:t>사진</a:t>
@@ -3796,7 +3796,7 @@
             <a:r>
               <a:rPr sz="1600" b="1" i="0">
                 <a:solidFill>
-                  <a:srgbClr val="29465B"/>
+                  <a:srgbClr val="224E6D"/>
                 </a:solidFill>
               </a:rPr>
               <a:t>신부</a:t>
@@ -3886,7 +3886,7 @@
     <p:bg>
       <p:bgPr>
         <a:solidFill>
-          <a:srgbClr val="F1F5F9"/>
+          <a:srgbClr val="F3F8FC"/>
         </a:solidFill>
         <a:effectLst/>
       </p:bgPr>
@@ -3913,7 +3913,7 @@
             <a:avLst/>
           </a:prstGeom>
           <a:solidFill>
-            <a:srgbClr val="497DA2"/>
+            <a:srgbClr val="5196C8"/>
           </a:solidFill>
           <a:ln>
             <a:noFill/>
@@ -3942,7 +3942,7 @@
             <a:avLst/>
           </a:prstGeom>
           <a:solidFill>
-            <a:srgbClr val="8D3F46"/>
+            <a:srgbClr val="339941"/>
           </a:solidFill>
           <a:ln>
             <a:noFill/>
@@ -3986,7 +3986,7 @@
             <a:r>
               <a:rPr sz="3000" b="1" i="0">
                 <a:solidFill>
-                  <a:srgbClr val="29465B"/>
+                  <a:srgbClr val="224E6D"/>
                 </a:solidFill>
               </a:rPr>
               <a:t>우리 두 사람</a:t>
@@ -4011,11 +4011,11 @@
             </a:avLst>
           </a:prstGeom>
           <a:solidFill>
-            <a:srgbClr val="F1F5F9"/>
+            <a:srgbClr val="F3F8FC"/>
           </a:solidFill>
           <a:ln w="12700">
             <a:solidFill>
-              <a:srgbClr val="D3E3EE"/>
+              <a:srgbClr val="D4E8F7"/>
             </a:solidFill>
           </a:ln>
         </p:spPr>
@@ -4044,7 +4044,7 @@
             </a:avLst>
           </a:prstGeom>
           <a:solidFill>
-            <a:srgbClr val="497DA2"/>
+            <a:srgbClr val="5196C8"/>
           </a:solidFill>
           <a:ln>
             <a:noFill/>
@@ -4196,11 +4196,11 @@
             </a:avLst>
           </a:prstGeom>
           <a:solidFill>
-            <a:srgbClr val="D3E3EE"/>
+            <a:srgbClr val="D4E8F7"/>
           </a:solidFill>
           <a:ln w="12700">
             <a:solidFill>
-              <a:srgbClr val="D3E3EE"/>
+              <a:srgbClr val="D4E8F7"/>
             </a:solidFill>
           </a:ln>
         </p:spPr>
@@ -4229,7 +4229,7 @@
             </a:avLst>
           </a:prstGeom>
           <a:solidFill>
-            <a:srgbClr val="29465B"/>
+            <a:srgbClr val="224E6D"/>
           </a:solidFill>
           <a:ln>
             <a:noFill/>
@@ -4378,7 +4378,7 @@
     <p:bg>
       <p:bgPr>
         <a:solidFill>
-          <a:srgbClr val="F1F5F9"/>
+          <a:srgbClr val="F3F8FC"/>
         </a:solidFill>
         <a:effectLst/>
       </p:bgPr>
@@ -4405,7 +4405,7 @@
             <a:avLst/>
           </a:prstGeom>
           <a:solidFill>
-            <a:srgbClr val="497DA2"/>
+            <a:srgbClr val="5196C8"/>
           </a:solidFill>
           <a:ln>
             <a:noFill/>
@@ -4434,7 +4434,7 @@
             <a:avLst/>
           </a:prstGeom>
           <a:solidFill>
-            <a:srgbClr val="8D3F46"/>
+            <a:srgbClr val="339941"/>
           </a:solidFill>
           <a:ln>
             <a:noFill/>
@@ -4478,7 +4478,7 @@
             <a:r>
               <a:rPr sz="3000" b="1" i="0">
                 <a:solidFill>
-                  <a:srgbClr val="29465B"/>
+                  <a:srgbClr val="224E6D"/>
                 </a:solidFill>
               </a:rPr>
               <a:t>서로에게 하고 싶은 말</a:t>
@@ -4503,11 +4503,11 @@
             </a:avLst>
           </a:prstGeom>
           <a:solidFill>
-            <a:srgbClr val="F1F5F9"/>
+            <a:srgbClr val="F3F8FC"/>
           </a:solidFill>
           <a:ln w="12700">
             <a:solidFill>
-              <a:srgbClr val="D3E3EE"/>
+              <a:srgbClr val="D4E8F7"/>
             </a:solidFill>
           </a:ln>
         </p:spPr>
@@ -4536,7 +4536,7 @@
             </a:avLst>
           </a:prstGeom>
           <a:solidFill>
-            <a:srgbClr val="497DA2"/>
+            <a:srgbClr val="5196C8"/>
           </a:solidFill>
           <a:ln>
             <a:noFill/>
@@ -4648,11 +4648,11 @@
             </a:avLst>
           </a:prstGeom>
           <a:solidFill>
-            <a:srgbClr val="D3E3EE"/>
+            <a:srgbClr val="D4E8F7"/>
           </a:solidFill>
           <a:ln w="12700">
             <a:solidFill>
-              <a:srgbClr val="D3E3EE"/>
+              <a:srgbClr val="D4E8F7"/>
             </a:solidFill>
           </a:ln>
         </p:spPr>
@@ -4681,7 +4681,7 @@
             </a:avLst>
           </a:prstGeom>
           <a:solidFill>
-            <a:srgbClr val="29465B"/>
+            <a:srgbClr val="224E6D"/>
           </a:solidFill>
           <a:ln>
             <a:noFill/>
@@ -4790,7 +4790,7 @@
     <p:bg>
       <p:bgPr>
         <a:solidFill>
-          <a:srgbClr val="F1F5F9"/>
+          <a:srgbClr val="F3F8FC"/>
         </a:solidFill>
         <a:effectLst/>
       </p:bgPr>
@@ -4817,7 +4817,7 @@
             <a:avLst/>
           </a:prstGeom>
           <a:solidFill>
-            <a:srgbClr val="497DA2"/>
+            <a:srgbClr val="5196C8"/>
           </a:solidFill>
           <a:ln>
             <a:noFill/>
@@ -4846,7 +4846,7 @@
             <a:avLst/>
           </a:prstGeom>
           <a:solidFill>
-            <a:srgbClr val="8D3F46"/>
+            <a:srgbClr val="339941"/>
           </a:solidFill>
           <a:ln>
             <a:noFill/>
@@ -4890,7 +4890,7 @@
             <a:r>
               <a:rPr sz="3000" b="1" i="0">
                 <a:solidFill>
-                  <a:srgbClr val="29465B"/>
+                  <a:srgbClr val="224E6D"/>
                 </a:solidFill>
               </a:rPr>
               <a:t>웨딩 사진</a:t>
@@ -4915,11 +4915,11 @@
             </a:avLst>
           </a:prstGeom>
           <a:solidFill>
-            <a:srgbClr val="D3E3EE"/>
+            <a:srgbClr val="D4E8F7"/>
           </a:solidFill>
           <a:ln w="19050">
             <a:solidFill>
-              <a:srgbClr val="497DA2"/>
+              <a:srgbClr val="5196C8"/>
             </a:solidFill>
             <a:prstDash val="dash"/>
           </a:ln>
@@ -4938,7 +4938,7 @@
             <a:r>
               <a:rPr sz="1200" b="0" i="0">
                 <a:solidFill>
-                  <a:srgbClr val="29465B"/>
+                  <a:srgbClr val="224E6D"/>
                 </a:solidFill>
               </a:rPr>
               <a:t>사진 1</a:t>
@@ -4963,11 +4963,11 @@
             </a:avLst>
           </a:prstGeom>
           <a:solidFill>
-            <a:srgbClr val="D3E3EE"/>
+            <a:srgbClr val="D4E8F7"/>
           </a:solidFill>
           <a:ln w="19050">
             <a:solidFill>
-              <a:srgbClr val="497DA2"/>
+              <a:srgbClr val="5196C8"/>
             </a:solidFill>
             <a:prstDash val="dash"/>
           </a:ln>
@@ -4986,7 +4986,7 @@
             <a:r>
               <a:rPr sz="1200" b="0" i="0">
                 <a:solidFill>
-                  <a:srgbClr val="29465B"/>
+                  <a:srgbClr val="224E6D"/>
                 </a:solidFill>
               </a:rPr>
               <a:t>사진 2</a:t>
@@ -5011,11 +5011,11 @@
             </a:avLst>
           </a:prstGeom>
           <a:solidFill>
-            <a:srgbClr val="D3E3EE"/>
+            <a:srgbClr val="D4E8F7"/>
           </a:solidFill>
           <a:ln w="19050">
             <a:solidFill>
-              <a:srgbClr val="497DA2"/>
+              <a:srgbClr val="5196C8"/>
             </a:solidFill>
             <a:prstDash val="dash"/>
           </a:ln>
@@ -5034,7 +5034,7 @@
             <a:r>
               <a:rPr sz="1200" b="0" i="0">
                 <a:solidFill>
-                  <a:srgbClr val="29465B"/>
+                  <a:srgbClr val="224E6D"/>
                 </a:solidFill>
               </a:rPr>
               <a:t>사진 3</a:t>
@@ -5059,11 +5059,11 @@
             </a:avLst>
           </a:prstGeom>
           <a:solidFill>
-            <a:srgbClr val="D3E3EE"/>
+            <a:srgbClr val="D4E8F7"/>
           </a:solidFill>
           <a:ln w="19050">
             <a:solidFill>
-              <a:srgbClr val="497DA2"/>
+              <a:srgbClr val="5196C8"/>
             </a:solidFill>
             <a:prstDash val="dash"/>
           </a:ln>
@@ -5082,7 +5082,7 @@
             <a:r>
               <a:rPr sz="1200" b="0" i="0">
                 <a:solidFill>
-                  <a:srgbClr val="29465B"/>
+                  <a:srgbClr val="224E6D"/>
                 </a:solidFill>
               </a:rPr>
               <a:t>사진 4</a:t>
@@ -5107,11 +5107,11 @@
             </a:avLst>
           </a:prstGeom>
           <a:solidFill>
-            <a:srgbClr val="D3E3EE"/>
+            <a:srgbClr val="D4E8F7"/>
           </a:solidFill>
           <a:ln w="19050">
             <a:solidFill>
-              <a:srgbClr val="497DA2"/>
+              <a:srgbClr val="5196C8"/>
             </a:solidFill>
             <a:prstDash val="dash"/>
           </a:ln>
@@ -5130,7 +5130,7 @@
             <a:r>
               <a:rPr sz="1200" b="0" i="0">
                 <a:solidFill>
-                  <a:srgbClr val="29465B"/>
+                  <a:srgbClr val="224E6D"/>
                 </a:solidFill>
               </a:rPr>
               <a:t>사진 5</a:t>
@@ -5155,11 +5155,11 @@
             </a:avLst>
           </a:prstGeom>
           <a:solidFill>
-            <a:srgbClr val="D3E3EE"/>
+            <a:srgbClr val="D4E8F7"/>
           </a:solidFill>
           <a:ln w="19050">
             <a:solidFill>
-              <a:srgbClr val="497DA2"/>
+              <a:srgbClr val="5196C8"/>
             </a:solidFill>
             <a:prstDash val="dash"/>
           </a:ln>
@@ -5178,7 +5178,7 @@
             <a:r>
               <a:rPr sz="1200" b="0" i="0">
                 <a:solidFill>
-                  <a:srgbClr val="29465B"/>
+                  <a:srgbClr val="224E6D"/>
                 </a:solidFill>
               </a:rPr>
               <a:t>사진 6</a:t>
@@ -5258,7 +5258,7 @@
             <a:r>
               <a:rPr sz="3400" b="1" i="0">
                 <a:solidFill>
-                  <a:srgbClr val="29465B"/>
+                  <a:srgbClr val="224E6D"/>
                 </a:solidFill>
               </a:rPr>
               <a:t>와 주셔서 고맙습니다</a:t>
@@ -5296,7 +5296,7 @@
             <a:r>
               <a:rPr sz="1700" b="0" i="1">
                 <a:solidFill>
-                  <a:srgbClr val="29465B"/>
+                  <a:srgbClr val="224E6D"/>
                 </a:solidFill>
               </a:rPr>
               <a:t>잘 살겠습니다</a:t>
@@ -5361,34 +5361,34 @@
         <a:sysClr val="window" lastClr="FFFFFF"/>
       </a:lt1>
       <a:dk2>
-        <a:srgbClr val="29465B"/>
+        <a:srgbClr val="224E6D"/>
       </a:dk2>
       <a:lt2>
-        <a:srgbClr val="F1F5F9"/>
+        <a:srgbClr val="F3F8FC"/>
       </a:lt2>
       <a:accent1>
-        <a:srgbClr val="497DA2"/>
+        <a:srgbClr val="5196C8"/>
       </a:accent1>
       <a:accent2>
-        <a:srgbClr val="8D3F46"/>
+        <a:srgbClr val="339941"/>
       </a:accent2>
       <a:accent3>
-        <a:srgbClr val="29465B"/>
+        <a:srgbClr val="224E6D"/>
       </a:accent3>
       <a:accent4>
-        <a:srgbClr val="D3E3EE"/>
+        <a:srgbClr val="D4E8F7"/>
       </a:accent4>
       <a:accent5>
-        <a:srgbClr val="6B5E74"/>
+        <a:srgbClr val="429884"/>
       </a:accent5>
       <a:accent6>
-        <a:srgbClr val="7F909D"/>
+        <a:srgbClr val="7A95A7"/>
       </a:accent6>
       <a:hlink>
-        <a:srgbClr val="497DA2"/>
+        <a:srgbClr val="5196C8"/>
       </a:hlink>
       <a:folHlink>
-        <a:srgbClr val="29465B"/>
+        <a:srgbClr val="224E6D"/>
       </a:folHlink>
     </a:clrScheme>
     <a:fontScheme name="Office">
